--- a/Data Extraction/1-Comprehensive Guide to Data Extraction.pptx
+++ b/Data Extraction/1-Comprehensive Guide to Data Extraction.pptx
@@ -122,6 +122,11 @@
       </a:defRPr>
     </a:lvl9pPr>
   </p:defaultTextStyle>
+  <p:extLst>
+    <p:ext uri="{EFAFB233-063F-42B5-8137-9DF3F51BA10A}">
+      <p15:sldGuideLst xmlns:p15="http://schemas.microsoft.com/office/powerpoint/2012/main"/>
+    </p:ext>
+  </p:extLst>
 </p:presentation>
 </file>
 
@@ -2018,7 +2023,7 @@
           <a:bodyPr/>
           <a:lstStyle/>
           <a:p>
-            <a:fld id="{C128FA71-3A18-48C0-980F-4B68F7F63042}" type="datetime1">
+            <a:fld id="{E5832E5F-E72A-431C-9C5E-E452787EDE24}" type="datetime1">
               <a:rPr lang="en-US" smtClean="0"/>
               <a:t>10/3/2024</a:t>
             </a:fld>
@@ -2226,7 +2231,7 @@
           <a:bodyPr/>
           <a:lstStyle/>
           <a:p>
-            <a:fld id="{7104EDB3-C0E8-45F8-9E1D-1B6C8D1880C0}" type="datetime1">
+            <a:fld id="{AF97CF91-AE9A-44A1-8DD2-E9EDA1B77528}" type="datetime1">
               <a:rPr lang="en-US" smtClean="0"/>
               <a:t>10/3/2024</a:t>
             </a:fld>
@@ -2436,7 +2441,7 @@
           <a:bodyPr/>
           <a:lstStyle/>
           <a:p>
-            <a:fld id="{9CF0EC4B-54ED-4041-B552-9BA760FA3DBA}" type="datetime1">
+            <a:fld id="{204D23CB-7C6D-4B3D-B602-52B41955A2B2}" type="datetime1">
               <a:rPr lang="en-US" smtClean="0"/>
               <a:t>10/3/2024</a:t>
             </a:fld>
@@ -2634,7 +2639,7 @@
           <a:bodyPr/>
           <a:lstStyle/>
           <a:p>
-            <a:fld id="{51C1210E-201E-4473-82AC-2466F5386C38}" type="datetime1">
+            <a:fld id="{CE15CB19-9A1E-4133-AF02-0B0EC95FDA15}" type="datetime1">
               <a:rPr lang="en-US" smtClean="0"/>
               <a:t>10/3/2024</a:t>
             </a:fld>
@@ -2912,7 +2917,7 @@
           <a:bodyPr/>
           <a:lstStyle/>
           <a:p>
-            <a:fld id="{B01EA198-6CAB-4B8F-B93F-1F9C8C4B6CE7}" type="datetime1">
+            <a:fld id="{729FD844-B775-4946-A725-12E2F2D6EC1B}" type="datetime1">
               <a:rPr lang="en-US" smtClean="0"/>
               <a:t>10/3/2024</a:t>
             </a:fld>
@@ -3184,7 +3189,7 @@
           <a:bodyPr/>
           <a:lstStyle/>
           <a:p>
-            <a:fld id="{CA06041F-4525-44D5-AA4F-332294BF1F56}" type="datetime1">
+            <a:fld id="{F8B6FCFE-21AF-4E4D-BF84-2F76BF76933D}" type="datetime1">
               <a:rPr lang="en-US" smtClean="0"/>
               <a:t>10/3/2024</a:t>
             </a:fld>
@@ -3608,7 +3613,7 @@
           <a:bodyPr/>
           <a:lstStyle/>
           <a:p>
-            <a:fld id="{F9557091-BBDF-4EB9-BA6B-2BB67AC4FC0F}" type="datetime1">
+            <a:fld id="{96F2699B-39AB-440A-8702-58F82CB9BA2D}" type="datetime1">
               <a:rPr lang="en-US" smtClean="0"/>
               <a:t>10/3/2024</a:t>
             </a:fld>
@@ -3749,7 +3754,7 @@
           <a:bodyPr/>
           <a:lstStyle/>
           <a:p>
-            <a:fld id="{2D6B226B-77A6-410C-9796-083F278E0125}" type="datetime1">
+            <a:fld id="{08E3C0EB-EF60-4087-96F5-D15276412784}" type="datetime1">
               <a:rPr lang="en-US" smtClean="0"/>
               <a:t>10/3/2024</a:t>
             </a:fld>
@@ -3862,7 +3867,7 @@
           <a:bodyPr/>
           <a:lstStyle/>
           <a:p>
-            <a:fld id="{A23A578B-D289-4C40-8593-3D356C49DA58}" type="datetime1">
+            <a:fld id="{4DB1970B-46FF-466A-906C-A5E36F36C153}" type="datetime1">
               <a:rPr lang="en-US" smtClean="0"/>
               <a:t>10/3/2024</a:t>
             </a:fld>
@@ -4181,7 +4186,7 @@
           <a:bodyPr/>
           <a:lstStyle/>
           <a:p>
-            <a:fld id="{713DFAE3-14DB-48A7-A80F-80DDB072CE3D}" type="datetime1">
+            <a:fld id="{E85110EB-3F8B-4286-8B2D-C4D418D7F00F}" type="datetime1">
               <a:rPr lang="en-US" smtClean="0"/>
               <a:t>10/3/2024</a:t>
             </a:fld>
@@ -4475,7 +4480,7 @@
           <a:bodyPr/>
           <a:lstStyle/>
           <a:p>
-            <a:fld id="{92C5EAEF-6478-4102-8F5D-A5FE9FC97ACB}" type="datetime1">
+            <a:fld id="{1377BF1D-2693-4023-B09D-FA233CA1F15B}" type="datetime1">
               <a:rPr lang="en-US" smtClean="0"/>
               <a:t>10/3/2024</a:t>
             </a:fld>
@@ -4716,7 +4721,7 @@
             </a:lvl1pPr>
           </a:lstStyle>
           <a:p>
-            <a:fld id="{67F45AC6-C491-4585-A584-9CE2AF7D5500}" type="datetime1">
+            <a:fld id="{3F5FFAB0-C8E7-489A-B51A-AE1AA5F39E69}" type="datetime1">
               <a:rPr lang="en-US" smtClean="0"/>
               <a:t>10/3/2024</a:t>
             </a:fld>
@@ -4831,7 +4836,7 @@
     <p:sldLayoutId id="2147483670" r:id="rId10"/>
     <p:sldLayoutId id="2147483671" r:id="rId11"/>
   </p:sldLayoutIdLst>
-  <p:hf sldNum="0" hdr="0" ftr="0" dt="0"/>
+  <p:hf hdr="0" ftr="0" dt="0"/>
   <p:txStyles>
     <p:titleStyle>
       <a:lvl1pPr algn="l" defTabSz="914400" rtl="0" eaLnBrk="1" latinLnBrk="0" hangingPunct="1">
@@ -5463,6 +5468,35 @@
           </a:p>
         </p:txBody>
       </p:sp>
+      <p:sp>
+        <p:nvSpPr>
+          <p:cNvPr id="5" name="Slide Number Placeholder 4">
+            <a:extLst>
+              <a:ext uri="{FF2B5EF4-FFF2-40B4-BE49-F238E27FC236}">
+                <a16:creationId xmlns:a16="http://schemas.microsoft.com/office/drawing/2014/main" id="{07E2A3D5-4E4B-6F33-3F38-05391813F075}"/>
+              </a:ext>
+            </a:extLst>
+          </p:cNvPr>
+          <p:cNvSpPr>
+            <a:spLocks noGrp="1"/>
+          </p:cNvSpPr>
+          <p:nvPr>
+            <p:ph type="sldNum" sz="quarter" idx="12"/>
+          </p:nvPr>
+        </p:nvSpPr>
+        <p:spPr/>
+        <p:txBody>
+          <a:bodyPr/>
+          <a:lstStyle/>
+          <a:p>
+            <a:fld id="{CC057153-B650-4DEB-B370-79DDCFDCE934}" type="slidenum">
+              <a:rPr lang="en-US" smtClean="0"/>
+              <a:t>1</a:t>
+            </a:fld>
+            <a:endParaRPr lang="en-US"/>
+          </a:p>
+        </p:txBody>
+      </p:sp>
     </p:spTree>
     <p:extLst>
       <p:ext uri="{BB962C8B-B14F-4D97-AF65-F5344CB8AC3E}">
@@ -5956,6 +5990,35 @@
           </a:p>
         </p:txBody>
       </p:sp>
+      <p:sp>
+        <p:nvSpPr>
+          <p:cNvPr id="3" name="Slide Number Placeholder 2">
+            <a:extLst>
+              <a:ext uri="{FF2B5EF4-FFF2-40B4-BE49-F238E27FC236}">
+                <a16:creationId xmlns:a16="http://schemas.microsoft.com/office/drawing/2014/main" id="{55AA0D25-660E-1B3B-C70C-B2EF4CCF7EAF}"/>
+              </a:ext>
+            </a:extLst>
+          </p:cNvPr>
+          <p:cNvSpPr>
+            <a:spLocks noGrp="1"/>
+          </p:cNvSpPr>
+          <p:nvPr>
+            <p:ph type="sldNum" sz="quarter" idx="12"/>
+          </p:nvPr>
+        </p:nvSpPr>
+        <p:spPr/>
+        <p:txBody>
+          <a:bodyPr/>
+          <a:lstStyle/>
+          <a:p>
+            <a:fld id="{CC057153-B650-4DEB-B370-79DDCFDCE934}" type="slidenum">
+              <a:rPr lang="en-US" smtClean="0"/>
+              <a:t>10</a:t>
+            </a:fld>
+            <a:endParaRPr lang="en-US"/>
+          </a:p>
+        </p:txBody>
+      </p:sp>
     </p:spTree>
     <p:extLst>
       <p:ext uri="{BB962C8B-B14F-4D97-AF65-F5344CB8AC3E}">
@@ -6371,6 +6434,35 @@
           </a:p>
         </p:txBody>
       </p:sp>
+      <p:sp>
+        <p:nvSpPr>
+          <p:cNvPr id="3" name="Slide Number Placeholder 2">
+            <a:extLst>
+              <a:ext uri="{FF2B5EF4-FFF2-40B4-BE49-F238E27FC236}">
+                <a16:creationId xmlns:a16="http://schemas.microsoft.com/office/drawing/2014/main" id="{BD62988B-F2CD-D6F0-9720-81C1550BF003}"/>
+              </a:ext>
+            </a:extLst>
+          </p:cNvPr>
+          <p:cNvSpPr>
+            <a:spLocks noGrp="1"/>
+          </p:cNvSpPr>
+          <p:nvPr>
+            <p:ph type="sldNum" sz="quarter" idx="12"/>
+          </p:nvPr>
+        </p:nvSpPr>
+        <p:spPr/>
+        <p:txBody>
+          <a:bodyPr/>
+          <a:lstStyle/>
+          <a:p>
+            <a:fld id="{CC057153-B650-4DEB-B370-79DDCFDCE934}" type="slidenum">
+              <a:rPr lang="en-US" smtClean="0"/>
+              <a:t>11</a:t>
+            </a:fld>
+            <a:endParaRPr lang="en-US"/>
+          </a:p>
+        </p:txBody>
+      </p:sp>
     </p:spTree>
     <p:extLst>
       <p:ext uri="{BB962C8B-B14F-4D97-AF65-F5344CB8AC3E}">
@@ -6786,6 +6878,35 @@
           </a:p>
         </p:txBody>
       </p:sp>
+      <p:sp>
+        <p:nvSpPr>
+          <p:cNvPr id="3" name="Slide Number Placeholder 2">
+            <a:extLst>
+              <a:ext uri="{FF2B5EF4-FFF2-40B4-BE49-F238E27FC236}">
+                <a16:creationId xmlns:a16="http://schemas.microsoft.com/office/drawing/2014/main" id="{4EBD2570-C0EF-F8EC-4980-1C81278B0F00}"/>
+              </a:ext>
+            </a:extLst>
+          </p:cNvPr>
+          <p:cNvSpPr>
+            <a:spLocks noGrp="1"/>
+          </p:cNvSpPr>
+          <p:nvPr>
+            <p:ph type="sldNum" sz="quarter" idx="12"/>
+          </p:nvPr>
+        </p:nvSpPr>
+        <p:spPr/>
+        <p:txBody>
+          <a:bodyPr/>
+          <a:lstStyle/>
+          <a:p>
+            <a:fld id="{CC057153-B650-4DEB-B370-79DDCFDCE934}" type="slidenum">
+              <a:rPr lang="en-US" smtClean="0"/>
+              <a:t>12</a:t>
+            </a:fld>
+            <a:endParaRPr lang="en-US"/>
+          </a:p>
+        </p:txBody>
+      </p:sp>
     </p:spTree>
     <p:extLst>
       <p:ext uri="{BB962C8B-B14F-4D97-AF65-F5344CB8AC3E}">
@@ -7196,6 +7317,35 @@
           </a:p>
         </p:txBody>
       </p:sp>
+      <p:sp>
+        <p:nvSpPr>
+          <p:cNvPr id="3" name="Slide Number Placeholder 2">
+            <a:extLst>
+              <a:ext uri="{FF2B5EF4-FFF2-40B4-BE49-F238E27FC236}">
+                <a16:creationId xmlns:a16="http://schemas.microsoft.com/office/drawing/2014/main" id="{7854083A-478A-2613-26AF-0595220DE40E}"/>
+              </a:ext>
+            </a:extLst>
+          </p:cNvPr>
+          <p:cNvSpPr>
+            <a:spLocks noGrp="1"/>
+          </p:cNvSpPr>
+          <p:nvPr>
+            <p:ph type="sldNum" sz="quarter" idx="12"/>
+          </p:nvPr>
+        </p:nvSpPr>
+        <p:spPr/>
+        <p:txBody>
+          <a:bodyPr/>
+          <a:lstStyle/>
+          <a:p>
+            <a:fld id="{CC057153-B650-4DEB-B370-79DDCFDCE934}" type="slidenum">
+              <a:rPr lang="en-US" smtClean="0"/>
+              <a:t>13</a:t>
+            </a:fld>
+            <a:endParaRPr lang="en-US"/>
+          </a:p>
+        </p:txBody>
+      </p:sp>
     </p:spTree>
     <p:extLst>
       <p:ext uri="{BB962C8B-B14F-4D97-AF65-F5344CB8AC3E}">
@@ -7627,6 +7777,35 @@
           </a:p>
         </p:txBody>
       </p:sp>
+      <p:sp>
+        <p:nvSpPr>
+          <p:cNvPr id="3" name="Slide Number Placeholder 2">
+            <a:extLst>
+              <a:ext uri="{FF2B5EF4-FFF2-40B4-BE49-F238E27FC236}">
+                <a16:creationId xmlns:a16="http://schemas.microsoft.com/office/drawing/2014/main" id="{3CBE122A-F1D5-812A-ED98-FE26FF9125A6}"/>
+              </a:ext>
+            </a:extLst>
+          </p:cNvPr>
+          <p:cNvSpPr>
+            <a:spLocks noGrp="1"/>
+          </p:cNvSpPr>
+          <p:nvPr>
+            <p:ph type="sldNum" sz="quarter" idx="12"/>
+          </p:nvPr>
+        </p:nvSpPr>
+        <p:spPr/>
+        <p:txBody>
+          <a:bodyPr/>
+          <a:lstStyle/>
+          <a:p>
+            <a:fld id="{CC057153-B650-4DEB-B370-79DDCFDCE934}" type="slidenum">
+              <a:rPr lang="en-US" smtClean="0"/>
+              <a:t>14</a:t>
+            </a:fld>
+            <a:endParaRPr lang="en-US"/>
+          </a:p>
+        </p:txBody>
+      </p:sp>
     </p:spTree>
     <p:extLst>
       <p:ext uri="{BB962C8B-B14F-4D97-AF65-F5344CB8AC3E}">
@@ -8132,6 +8311,35 @@
           </a:p>
         </p:txBody>
       </p:sp>
+      <p:sp>
+        <p:nvSpPr>
+          <p:cNvPr id="3" name="Slide Number Placeholder 2">
+            <a:extLst>
+              <a:ext uri="{FF2B5EF4-FFF2-40B4-BE49-F238E27FC236}">
+                <a16:creationId xmlns:a16="http://schemas.microsoft.com/office/drawing/2014/main" id="{B6516059-EF32-F617-ECBD-09E7E970FD61}"/>
+              </a:ext>
+            </a:extLst>
+          </p:cNvPr>
+          <p:cNvSpPr>
+            <a:spLocks noGrp="1"/>
+          </p:cNvSpPr>
+          <p:nvPr>
+            <p:ph type="sldNum" sz="quarter" idx="12"/>
+          </p:nvPr>
+        </p:nvSpPr>
+        <p:spPr/>
+        <p:txBody>
+          <a:bodyPr/>
+          <a:lstStyle/>
+          <a:p>
+            <a:fld id="{CC057153-B650-4DEB-B370-79DDCFDCE934}" type="slidenum">
+              <a:rPr lang="en-US" smtClean="0"/>
+              <a:t>15</a:t>
+            </a:fld>
+            <a:endParaRPr lang="en-US"/>
+          </a:p>
+        </p:txBody>
+      </p:sp>
     </p:spTree>
     <p:extLst>
       <p:ext uri="{BB962C8B-B14F-4D97-AF65-F5344CB8AC3E}">
@@ -8542,6 +8750,35 @@
           </a:p>
         </p:txBody>
       </p:sp>
+      <p:sp>
+        <p:nvSpPr>
+          <p:cNvPr id="3" name="Slide Number Placeholder 2">
+            <a:extLst>
+              <a:ext uri="{FF2B5EF4-FFF2-40B4-BE49-F238E27FC236}">
+                <a16:creationId xmlns:a16="http://schemas.microsoft.com/office/drawing/2014/main" id="{84F6A77C-6C29-9278-3FCB-2F70D171707B}"/>
+              </a:ext>
+            </a:extLst>
+          </p:cNvPr>
+          <p:cNvSpPr>
+            <a:spLocks noGrp="1"/>
+          </p:cNvSpPr>
+          <p:nvPr>
+            <p:ph type="sldNum" sz="quarter" idx="12"/>
+          </p:nvPr>
+        </p:nvSpPr>
+        <p:spPr/>
+        <p:txBody>
+          <a:bodyPr/>
+          <a:lstStyle/>
+          <a:p>
+            <a:fld id="{CC057153-B650-4DEB-B370-79DDCFDCE934}" type="slidenum">
+              <a:rPr lang="en-US" smtClean="0"/>
+              <a:t>16</a:t>
+            </a:fld>
+            <a:endParaRPr lang="en-US"/>
+          </a:p>
+        </p:txBody>
+      </p:sp>
     </p:spTree>
     <p:extLst>
       <p:ext uri="{BB962C8B-B14F-4D97-AF65-F5344CB8AC3E}">
@@ -9023,6 +9260,35 @@
           </a:p>
         </p:txBody>
       </p:sp>
+      <p:sp>
+        <p:nvSpPr>
+          <p:cNvPr id="3" name="Slide Number Placeholder 2">
+            <a:extLst>
+              <a:ext uri="{FF2B5EF4-FFF2-40B4-BE49-F238E27FC236}">
+                <a16:creationId xmlns:a16="http://schemas.microsoft.com/office/drawing/2014/main" id="{675F2E60-5968-4D5E-AEA2-EE2FD792C23D}"/>
+              </a:ext>
+            </a:extLst>
+          </p:cNvPr>
+          <p:cNvSpPr>
+            <a:spLocks noGrp="1"/>
+          </p:cNvSpPr>
+          <p:nvPr>
+            <p:ph type="sldNum" sz="quarter" idx="12"/>
+          </p:nvPr>
+        </p:nvSpPr>
+        <p:spPr/>
+        <p:txBody>
+          <a:bodyPr/>
+          <a:lstStyle/>
+          <a:p>
+            <a:fld id="{CC057153-B650-4DEB-B370-79DDCFDCE934}" type="slidenum">
+              <a:rPr lang="en-US" smtClean="0"/>
+              <a:t>2</a:t>
+            </a:fld>
+            <a:endParaRPr lang="en-US"/>
+          </a:p>
+        </p:txBody>
+      </p:sp>
     </p:spTree>
     <p:extLst>
       <p:ext uri="{BB962C8B-B14F-4D97-AF65-F5344CB8AC3E}">
@@ -9433,6 +9699,35 @@
           </a:p>
         </p:txBody>
       </p:sp>
+      <p:sp>
+        <p:nvSpPr>
+          <p:cNvPr id="3" name="Slide Number Placeholder 2">
+            <a:extLst>
+              <a:ext uri="{FF2B5EF4-FFF2-40B4-BE49-F238E27FC236}">
+                <a16:creationId xmlns:a16="http://schemas.microsoft.com/office/drawing/2014/main" id="{C10586F3-59D3-87CE-0697-57BA24E08CFB}"/>
+              </a:ext>
+            </a:extLst>
+          </p:cNvPr>
+          <p:cNvSpPr>
+            <a:spLocks noGrp="1"/>
+          </p:cNvSpPr>
+          <p:nvPr>
+            <p:ph type="sldNum" sz="quarter" idx="12"/>
+          </p:nvPr>
+        </p:nvSpPr>
+        <p:spPr/>
+        <p:txBody>
+          <a:bodyPr/>
+          <a:lstStyle/>
+          <a:p>
+            <a:fld id="{CC057153-B650-4DEB-B370-79DDCFDCE934}" type="slidenum">
+              <a:rPr lang="en-US" smtClean="0"/>
+              <a:t>3</a:t>
+            </a:fld>
+            <a:endParaRPr lang="en-US"/>
+          </a:p>
+        </p:txBody>
+      </p:sp>
     </p:spTree>
     <p:extLst>
       <p:ext uri="{BB962C8B-B14F-4D97-AF65-F5344CB8AC3E}">
@@ -9843,6 +10138,35 @@
           </a:p>
         </p:txBody>
       </p:sp>
+      <p:sp>
+        <p:nvSpPr>
+          <p:cNvPr id="3" name="Slide Number Placeholder 2">
+            <a:extLst>
+              <a:ext uri="{FF2B5EF4-FFF2-40B4-BE49-F238E27FC236}">
+                <a16:creationId xmlns:a16="http://schemas.microsoft.com/office/drawing/2014/main" id="{DB57DC74-39F5-C0DF-A66C-AAD3E1564020}"/>
+              </a:ext>
+            </a:extLst>
+          </p:cNvPr>
+          <p:cNvSpPr>
+            <a:spLocks noGrp="1"/>
+          </p:cNvSpPr>
+          <p:nvPr>
+            <p:ph type="sldNum" sz="quarter" idx="12"/>
+          </p:nvPr>
+        </p:nvSpPr>
+        <p:spPr/>
+        <p:txBody>
+          <a:bodyPr/>
+          <a:lstStyle/>
+          <a:p>
+            <a:fld id="{CC057153-B650-4DEB-B370-79DDCFDCE934}" type="slidenum">
+              <a:rPr lang="en-US" smtClean="0"/>
+              <a:t>4</a:t>
+            </a:fld>
+            <a:endParaRPr lang="en-US"/>
+          </a:p>
+        </p:txBody>
+      </p:sp>
     </p:spTree>
     <p:extLst>
       <p:ext uri="{BB962C8B-B14F-4D97-AF65-F5344CB8AC3E}">
@@ -10258,6 +10582,35 @@
           </a:p>
         </p:txBody>
       </p:sp>
+      <p:sp>
+        <p:nvSpPr>
+          <p:cNvPr id="3" name="Slide Number Placeholder 2">
+            <a:extLst>
+              <a:ext uri="{FF2B5EF4-FFF2-40B4-BE49-F238E27FC236}">
+                <a16:creationId xmlns:a16="http://schemas.microsoft.com/office/drawing/2014/main" id="{CA461DFA-5AE8-07D7-808B-CC9C3EB46F7C}"/>
+              </a:ext>
+            </a:extLst>
+          </p:cNvPr>
+          <p:cNvSpPr>
+            <a:spLocks noGrp="1"/>
+          </p:cNvSpPr>
+          <p:nvPr>
+            <p:ph type="sldNum" sz="quarter" idx="12"/>
+          </p:nvPr>
+        </p:nvSpPr>
+        <p:spPr/>
+        <p:txBody>
+          <a:bodyPr/>
+          <a:lstStyle/>
+          <a:p>
+            <a:fld id="{CC057153-B650-4DEB-B370-79DDCFDCE934}" type="slidenum">
+              <a:rPr lang="en-US" smtClean="0"/>
+              <a:t>5</a:t>
+            </a:fld>
+            <a:endParaRPr lang="en-US"/>
+          </a:p>
+        </p:txBody>
+      </p:sp>
     </p:spTree>
     <p:extLst>
       <p:ext uri="{BB962C8B-B14F-4D97-AF65-F5344CB8AC3E}">
@@ -10718,6 +11071,35 @@
           </a:p>
         </p:txBody>
       </p:sp>
+      <p:sp>
+        <p:nvSpPr>
+          <p:cNvPr id="3" name="Slide Number Placeholder 2">
+            <a:extLst>
+              <a:ext uri="{FF2B5EF4-FFF2-40B4-BE49-F238E27FC236}">
+                <a16:creationId xmlns:a16="http://schemas.microsoft.com/office/drawing/2014/main" id="{C8273050-8688-D949-DB7D-D445E1E18F45}"/>
+              </a:ext>
+            </a:extLst>
+          </p:cNvPr>
+          <p:cNvSpPr>
+            <a:spLocks noGrp="1"/>
+          </p:cNvSpPr>
+          <p:nvPr>
+            <p:ph type="sldNum" sz="quarter" idx="12"/>
+          </p:nvPr>
+        </p:nvSpPr>
+        <p:spPr/>
+        <p:txBody>
+          <a:bodyPr/>
+          <a:lstStyle/>
+          <a:p>
+            <a:fld id="{CC057153-B650-4DEB-B370-79DDCFDCE934}" type="slidenum">
+              <a:rPr lang="en-US" smtClean="0"/>
+              <a:t>6</a:t>
+            </a:fld>
+            <a:endParaRPr lang="en-US"/>
+          </a:p>
+        </p:txBody>
+      </p:sp>
     </p:spTree>
     <p:extLst>
       <p:ext uri="{BB962C8B-B14F-4D97-AF65-F5344CB8AC3E}">
@@ -11149,6 +11531,35 @@
           </a:p>
         </p:txBody>
       </p:sp>
+      <p:sp>
+        <p:nvSpPr>
+          <p:cNvPr id="3" name="Slide Number Placeholder 2">
+            <a:extLst>
+              <a:ext uri="{FF2B5EF4-FFF2-40B4-BE49-F238E27FC236}">
+                <a16:creationId xmlns:a16="http://schemas.microsoft.com/office/drawing/2014/main" id="{2E4175C2-2EAA-32A2-900F-CBCBEFA4C8E4}"/>
+              </a:ext>
+            </a:extLst>
+          </p:cNvPr>
+          <p:cNvSpPr>
+            <a:spLocks noGrp="1"/>
+          </p:cNvSpPr>
+          <p:nvPr>
+            <p:ph type="sldNum" sz="quarter" idx="12"/>
+          </p:nvPr>
+        </p:nvSpPr>
+        <p:spPr/>
+        <p:txBody>
+          <a:bodyPr/>
+          <a:lstStyle/>
+          <a:p>
+            <a:fld id="{CC057153-B650-4DEB-B370-79DDCFDCE934}" type="slidenum">
+              <a:rPr lang="en-US" smtClean="0"/>
+              <a:t>7</a:t>
+            </a:fld>
+            <a:endParaRPr lang="en-US"/>
+          </a:p>
+        </p:txBody>
+      </p:sp>
     </p:spTree>
     <p:extLst>
       <p:ext uri="{BB962C8B-B14F-4D97-AF65-F5344CB8AC3E}">
@@ -11654,6 +12065,35 @@
           </a:p>
         </p:txBody>
       </p:sp>
+      <p:sp>
+        <p:nvSpPr>
+          <p:cNvPr id="3" name="Slide Number Placeholder 2">
+            <a:extLst>
+              <a:ext uri="{FF2B5EF4-FFF2-40B4-BE49-F238E27FC236}">
+                <a16:creationId xmlns:a16="http://schemas.microsoft.com/office/drawing/2014/main" id="{6ECF3050-BAA1-06D2-1C41-BBA22ABDCF62}"/>
+              </a:ext>
+            </a:extLst>
+          </p:cNvPr>
+          <p:cNvSpPr>
+            <a:spLocks noGrp="1"/>
+          </p:cNvSpPr>
+          <p:nvPr>
+            <p:ph type="sldNum" sz="quarter" idx="12"/>
+          </p:nvPr>
+        </p:nvSpPr>
+        <p:spPr/>
+        <p:txBody>
+          <a:bodyPr/>
+          <a:lstStyle/>
+          <a:p>
+            <a:fld id="{CC057153-B650-4DEB-B370-79DDCFDCE934}" type="slidenum">
+              <a:rPr lang="en-US" smtClean="0"/>
+              <a:t>8</a:t>
+            </a:fld>
+            <a:endParaRPr lang="en-US"/>
+          </a:p>
+        </p:txBody>
+      </p:sp>
     </p:spTree>
     <p:extLst>
       <p:ext uri="{BB962C8B-B14F-4D97-AF65-F5344CB8AC3E}">
@@ -12132,6 +12572,35 @@
               <a:t>Sensors, IoT devices, and social media platforms are newer sources of data that are growing in importance for organizations as they look to collect data from a wide range of sources.</a:t>
             </a:r>
             <a:endParaRPr lang="en-IN" sz="1400"/>
+          </a:p>
+        </p:txBody>
+      </p:sp>
+      <p:sp>
+        <p:nvSpPr>
+          <p:cNvPr id="3" name="Slide Number Placeholder 2">
+            <a:extLst>
+              <a:ext uri="{FF2B5EF4-FFF2-40B4-BE49-F238E27FC236}">
+                <a16:creationId xmlns:a16="http://schemas.microsoft.com/office/drawing/2014/main" id="{00C6DAAB-B28E-89B5-248D-E5E520344716}"/>
+              </a:ext>
+            </a:extLst>
+          </p:cNvPr>
+          <p:cNvSpPr>
+            <a:spLocks noGrp="1"/>
+          </p:cNvSpPr>
+          <p:nvPr>
+            <p:ph type="sldNum" sz="quarter" idx="12"/>
+          </p:nvPr>
+        </p:nvSpPr>
+        <p:spPr/>
+        <p:txBody>
+          <a:bodyPr/>
+          <a:lstStyle/>
+          <a:p>
+            <a:fld id="{CC057153-B650-4DEB-B370-79DDCFDCE934}" type="slidenum">
+              <a:rPr lang="en-US" smtClean="0"/>
+              <a:t>9</a:t>
+            </a:fld>
+            <a:endParaRPr lang="en-US"/>
           </a:p>
         </p:txBody>
       </p:sp>
